--- a/e2e/fixtures/fidelity-showcase.pptx
+++ b/e2e/fixtures/fidelity-showcase.pptx
@@ -401,7 +401,7 @@
       </p:grpSpPr>
       <p:sp>
         <p:nvSpPr>
-          <p:cNvPr id="3" name="TextBox 1"/>
+          <p:cNvPr id="2" name="TextBox 1"/>
           <p:cNvSpPr txBox="1"/>
           <p:nvPr/>
         </p:nvSpPr>
@@ -429,7 +429,7 @@
       </p:sp>
       <p:sp>
         <p:nvSpPr>
-          <p:cNvPr id="2" name="Rectangle 2"/>
+          <p:cNvPr id="3" name="Rectangle 2"/>
           <p:cNvSpPr txBox="0"/>
           <p:nvPr/>
         </p:nvSpPr>

--- a/e2e/fixtures/fidelity-showcase.pptx
+++ b/e2e/fixtures/fidelity-showcase.pptx
@@ -418,12 +418,10 @@
           <a:bodyPr wrap="square"/>
           <a:lstStyle/>
           <a:p>
-            <a:pPr/>
             <a:r>
-              <a:rPr lang="en-US" dirty="0" sz="2250" b="1"/>
+              <a:rPr lang="en-US" sz="2250" b="1" dirty="0"/>
               <a:t>Fidelity Showcase</a:t>
             </a:r>
-            <a:endParaRPr lang="en-US"/>
           </a:p>
         </p:txBody>
       </p:sp>
@@ -459,16 +457,14 @@
           <a:bodyPr wrap="square"/>
           <a:lstStyle/>
           <a:p>
-            <a:pPr/>
             <a:r>
-              <a:rPr lang="en-US" dirty="0" sz="2100" b="1">
+              <a:rPr lang="en-US" sz="2100" b="1" dirty="0">
                 <a:solidFill>
                   <a:srgbClr val="FFFFFF"/>
                 </a:solidFill>
               </a:rPr>
               <a:t>PERSPECTIVE</a:t>
             </a:r>
-            <a:endParaRPr lang="en-US"/>
           </a:p>
         </p:txBody>
       </p:sp>
